--- a/cinco-proyectos-de-ia.pptx
+++ b/cinco-proyectos-de-ia.pptx
@@ -31000,7 +31000,7 @@
                 <a:ea typeface="Calibri" pitchFamily="34" charset="-122"/>
                 <a:cs typeface="Calibri" pitchFamily="34" charset="-120"/>
               </a:rPr>
-              <a:t>✓ Verificado localmente: bus.jpg → bus (84%) y 4 personas (90%, 88%, 87%, 43%) detectadas y ubicadas correctamente.</a:t>
+              <a:t>✓ Verificado en producción: bus.jpg → bus (84%) y 4 personas (90%, 88%, 87%, 43%) detectadas y ubicadas correctamente, idéntico al resultado local.</a:t>
             </a:r>
             <a:endParaRPr lang="en-US" sz="1400" dirty="0"/>
           </a:p>
